--- a/Pregrado/Investigacion en ciencia y tecnologia/Clases/Sesion 06 - Bases de datos CUN · gestores · marco teórico y revisión (U8+U10–12)/Presentacion.pptx
+++ b/Pregrado/Investigacion en ciencia y tecnologia/Clases/Sesion 06 - Bases de datos CUN · gestores · marco teórico y revisión (U8+U10–12)/Presentacion.pptx
@@ -3372,41 +3372,6 @@
           </a:p>
         </p:txBody>
       </p:sp>
-      <p:sp>
-        <p:nvSpPr>
-          <p:cNvPr id="7" name="TextBox 6"/>
-          <p:cNvSpPr txBox="1"/>
-          <p:nvPr/>
-        </p:nvSpPr>
-        <p:spPr>
-          <a:xfrm>
-            <a:off x="2194560" y="6446520"/>
-            <a:ext cx="5943600" cy="274320"/>
-          </a:xfrm>
-          <a:prstGeom prst="rect">
-            <a:avLst/>
-          </a:prstGeom>
-          <a:noFill/>
-        </p:spPr>
-        <p:txBody>
-          <a:bodyPr wrap="square" anchor="t" lIns="0" rIns="0" tIns="0" bIns="0">
-            <a:spAutoFit/>
-          </a:bodyPr>
-          <a:lstStyle/>
-          <a:p>
-            <a:pPr algn="l"/>
-            <a:r>
-              <a:rPr sz="1000" b="1" i="0">
-                <a:solidFill>
-                  <a:srgbClr val="8F989D"/>
-                </a:solidFill>
-                <a:latin typeface="Calibri"/>
-              </a:rPr>
-              <a:t>Inicio 5:10 pm</a:t>
-            </a:r>
-          </a:p>
-        </p:txBody>
-      </p:sp>
     </p:spTree>
   </p:cSld>
   <p:clrMapOvr>
@@ -3921,41 +3886,6 @@
         </p:nvSpPr>
         <p:spPr>
           <a:xfrm>
-            <a:off x="2194560" y="6446520"/>
-            <a:ext cx="5943600" cy="274320"/>
-          </a:xfrm>
-          <a:prstGeom prst="rect">
-            <a:avLst/>
-          </a:prstGeom>
-          <a:noFill/>
-        </p:spPr>
-        <p:txBody>
-          <a:bodyPr wrap="square" anchor="t" lIns="0" rIns="0" tIns="0" bIns="0">
-            <a:spAutoFit/>
-          </a:bodyPr>
-          <a:lstStyle/>
-          <a:p>
-            <a:pPr algn="l"/>
-            <a:r>
-              <a:rPr sz="1000" b="1" i="0">
-                <a:solidFill>
-                  <a:srgbClr val="8F989D"/>
-                </a:solidFill>
-                <a:latin typeface="Calibri"/>
-              </a:rPr>
-              <a:t>Inicio 5:10 pm</a:t>
-            </a:r>
-          </a:p>
-        </p:txBody>
-      </p:sp>
-      <p:sp>
-        <p:nvSpPr>
-          <p:cNvPr id="6" name="TextBox 5"/>
-          <p:cNvSpPr txBox="1"/>
-          <p:nvPr/>
-        </p:nvSpPr>
-        <p:spPr>
-          <a:xfrm>
             <a:off x="11094415" y="6446520"/>
             <a:ext cx="548640" cy="274320"/>
           </a:xfrm>
@@ -4223,41 +4153,6 @@
         </p:nvSpPr>
         <p:spPr>
           <a:xfrm>
-            <a:off x="2194560" y="6446520"/>
-            <a:ext cx="5943600" cy="274320"/>
-          </a:xfrm>
-          <a:prstGeom prst="rect">
-            <a:avLst/>
-          </a:prstGeom>
-          <a:noFill/>
-        </p:spPr>
-        <p:txBody>
-          <a:bodyPr wrap="square" anchor="t" lIns="0" rIns="0" tIns="0" bIns="0">
-            <a:spAutoFit/>
-          </a:bodyPr>
-          <a:lstStyle/>
-          <a:p>
-            <a:pPr algn="l"/>
-            <a:r>
-              <a:rPr sz="1000" b="1" i="0">
-                <a:solidFill>
-                  <a:srgbClr val="8F989D"/>
-                </a:solidFill>
-                <a:latin typeface="Calibri"/>
-              </a:rPr>
-              <a:t>Inicio 5:10 pm</a:t>
-            </a:r>
-          </a:p>
-        </p:txBody>
-      </p:sp>
-      <p:sp>
-        <p:nvSpPr>
-          <p:cNvPr id="6" name="TextBox 5"/>
-          <p:cNvSpPr txBox="1"/>
-          <p:nvPr/>
-        </p:nvSpPr>
-        <p:spPr>
-          <a:xfrm>
             <a:off x="11094415" y="6446520"/>
             <a:ext cx="548640" cy="274320"/>
           </a:xfrm>
@@ -4287,7 +4182,7 @@
       </p:sp>
       <p:sp>
         <p:nvSpPr>
-          <p:cNvPr id="7" name="TextBox 6"/>
+          <p:cNvPr id="6" name="TextBox 5"/>
           <p:cNvSpPr txBox="1"/>
           <p:nvPr/>
         </p:nvSpPr>
@@ -4759,41 +4654,6 @@
         </p:nvSpPr>
         <p:spPr>
           <a:xfrm>
-            <a:off x="2194560" y="6446520"/>
-            <a:ext cx="5943600" cy="274320"/>
-          </a:xfrm>
-          <a:prstGeom prst="rect">
-            <a:avLst/>
-          </a:prstGeom>
-          <a:noFill/>
-        </p:spPr>
-        <p:txBody>
-          <a:bodyPr wrap="square" anchor="t" lIns="0" rIns="0" tIns="0" bIns="0">
-            <a:spAutoFit/>
-          </a:bodyPr>
-          <a:lstStyle/>
-          <a:p>
-            <a:pPr algn="l"/>
-            <a:r>
-              <a:rPr sz="1000" b="1" i="0">
-                <a:solidFill>
-                  <a:srgbClr val="8F989D"/>
-                </a:solidFill>
-                <a:latin typeface="Calibri"/>
-              </a:rPr>
-              <a:t>Inicio 5:10 pm</a:t>
-            </a:r>
-          </a:p>
-        </p:txBody>
-      </p:sp>
-      <p:sp>
-        <p:nvSpPr>
-          <p:cNvPr id="11" name="TextBox 10"/>
-          <p:cNvSpPr txBox="1"/>
-          <p:nvPr/>
-        </p:nvSpPr>
-        <p:spPr>
-          <a:xfrm>
             <a:off x="11094415" y="6446520"/>
             <a:ext cx="548640" cy="274320"/>
           </a:xfrm>
@@ -5055,41 +4915,6 @@
         </p:nvSpPr>
         <p:spPr>
           <a:xfrm>
-            <a:off x="2194560" y="6446520"/>
-            <a:ext cx="5943600" cy="274320"/>
-          </a:xfrm>
-          <a:prstGeom prst="rect">
-            <a:avLst/>
-          </a:prstGeom>
-          <a:noFill/>
-        </p:spPr>
-        <p:txBody>
-          <a:bodyPr wrap="square" anchor="t" lIns="0" rIns="0" tIns="0" bIns="0">
-            <a:spAutoFit/>
-          </a:bodyPr>
-          <a:lstStyle/>
-          <a:p>
-            <a:pPr algn="l"/>
-            <a:r>
-              <a:rPr sz="1000" b="1" i="0">
-                <a:solidFill>
-                  <a:srgbClr val="8F989D"/>
-                </a:solidFill>
-                <a:latin typeface="Calibri"/>
-              </a:rPr>
-              <a:t>Inicio 5:10 pm</a:t>
-            </a:r>
-          </a:p>
-        </p:txBody>
-      </p:sp>
-      <p:sp>
-        <p:nvSpPr>
-          <p:cNvPr id="7" name="TextBox 6"/>
-          <p:cNvSpPr txBox="1"/>
-          <p:nvPr/>
-        </p:nvSpPr>
-        <p:spPr>
-          <a:xfrm>
             <a:off x="11094415" y="6446520"/>
             <a:ext cx="548640" cy="274320"/>
           </a:xfrm>
@@ -5541,41 +5366,6 @@
         </p:nvSpPr>
         <p:spPr>
           <a:xfrm>
-            <a:off x="2194560" y="6446520"/>
-            <a:ext cx="5943600" cy="274320"/>
-          </a:xfrm>
-          <a:prstGeom prst="rect">
-            <a:avLst/>
-          </a:prstGeom>
-          <a:noFill/>
-        </p:spPr>
-        <p:txBody>
-          <a:bodyPr wrap="square" anchor="t" lIns="0" rIns="0" tIns="0" bIns="0">
-            <a:spAutoFit/>
-          </a:bodyPr>
-          <a:lstStyle/>
-          <a:p>
-            <a:pPr algn="l"/>
-            <a:r>
-              <a:rPr sz="1000" b="1" i="0">
-                <a:solidFill>
-                  <a:srgbClr val="8F989D"/>
-                </a:solidFill>
-                <a:latin typeface="Calibri"/>
-              </a:rPr>
-              <a:t>Inicio 5:10 pm</a:t>
-            </a:r>
-          </a:p>
-        </p:txBody>
-      </p:sp>
-      <p:sp>
-        <p:nvSpPr>
-          <p:cNvPr id="6" name="TextBox 5"/>
-          <p:cNvSpPr txBox="1"/>
-          <p:nvPr/>
-        </p:nvSpPr>
-        <p:spPr>
-          <a:xfrm>
             <a:off x="11094415" y="6446520"/>
             <a:ext cx="548640" cy="274320"/>
           </a:xfrm>
@@ -5977,41 +5767,6 @@
         </p:nvSpPr>
         <p:spPr>
           <a:xfrm>
-            <a:off x="2194560" y="6446520"/>
-            <a:ext cx="5943600" cy="274320"/>
-          </a:xfrm>
-          <a:prstGeom prst="rect">
-            <a:avLst/>
-          </a:prstGeom>
-          <a:noFill/>
-        </p:spPr>
-        <p:txBody>
-          <a:bodyPr wrap="square" anchor="t" lIns="0" rIns="0" tIns="0" bIns="0">
-            <a:spAutoFit/>
-          </a:bodyPr>
-          <a:lstStyle/>
-          <a:p>
-            <a:pPr algn="l"/>
-            <a:r>
-              <a:rPr sz="1000" b="1" i="0">
-                <a:solidFill>
-                  <a:srgbClr val="8F989D"/>
-                </a:solidFill>
-                <a:latin typeface="Calibri"/>
-              </a:rPr>
-              <a:t>Inicio 5:10 pm</a:t>
-            </a:r>
-          </a:p>
-        </p:txBody>
-      </p:sp>
-      <p:sp>
-        <p:nvSpPr>
-          <p:cNvPr id="6" name="TextBox 5"/>
-          <p:cNvSpPr txBox="1"/>
-          <p:nvPr/>
-        </p:nvSpPr>
-        <p:spPr>
-          <a:xfrm>
             <a:off x="11094415" y="6446520"/>
             <a:ext cx="548640" cy="274320"/>
           </a:xfrm>
@@ -6288,41 +6043,6 @@
       <p:sp>
         <p:nvSpPr>
           <p:cNvPr id="5" name="TextBox 4"/>
-          <p:cNvSpPr txBox="1"/>
-          <p:nvPr/>
-        </p:nvSpPr>
-        <p:spPr>
-          <a:xfrm>
-            <a:off x="2194560" y="6446520"/>
-            <a:ext cx="5943600" cy="274320"/>
-          </a:xfrm>
-          <a:prstGeom prst="rect">
-            <a:avLst/>
-          </a:prstGeom>
-          <a:noFill/>
-        </p:spPr>
-        <p:txBody>
-          <a:bodyPr wrap="square" anchor="t" lIns="0" rIns="0" tIns="0" bIns="0">
-            <a:spAutoFit/>
-          </a:bodyPr>
-          <a:lstStyle/>
-          <a:p>
-            <a:pPr algn="l"/>
-            <a:r>
-              <a:rPr sz="1000" b="1" i="0">
-                <a:solidFill>
-                  <a:srgbClr val="8F989D"/>
-                </a:solidFill>
-                <a:latin typeface="Calibri"/>
-              </a:rPr>
-              <a:t>Inicio 5:10 pm</a:t>
-            </a:r>
-          </a:p>
-        </p:txBody>
-      </p:sp>
-      <p:sp>
-        <p:nvSpPr>
-          <p:cNvPr id="6" name="TextBox 5"/>
           <p:cNvSpPr txBox="1"/>
           <p:nvPr/>
         </p:nvSpPr>
@@ -6982,41 +6702,6 @@
         </p:nvSpPr>
         <p:spPr>
           <a:xfrm>
-            <a:off x="2194560" y="6446520"/>
-            <a:ext cx="5943600" cy="274320"/>
-          </a:xfrm>
-          <a:prstGeom prst="rect">
-            <a:avLst/>
-          </a:prstGeom>
-          <a:noFill/>
-        </p:spPr>
-        <p:txBody>
-          <a:bodyPr wrap="square" anchor="t" lIns="0" rIns="0" tIns="0" bIns="0">
-            <a:spAutoFit/>
-          </a:bodyPr>
-          <a:lstStyle/>
-          <a:p>
-            <a:pPr algn="l"/>
-            <a:r>
-              <a:rPr sz="1000" b="1" i="0">
-                <a:solidFill>
-                  <a:srgbClr val="8F989D"/>
-                </a:solidFill>
-                <a:latin typeface="Calibri"/>
-              </a:rPr>
-              <a:t>Inicio 5:10 pm</a:t>
-            </a:r>
-          </a:p>
-        </p:txBody>
-      </p:sp>
-      <p:sp>
-        <p:nvSpPr>
-          <p:cNvPr id="7" name="TextBox 6"/>
-          <p:cNvSpPr txBox="1"/>
-          <p:nvPr/>
-        </p:nvSpPr>
-        <p:spPr>
-          <a:xfrm>
             <a:off x="11094415" y="6446520"/>
             <a:ext cx="548640" cy="274320"/>
           </a:xfrm>
@@ -7400,41 +7085,6 @@
         </p:nvSpPr>
         <p:spPr>
           <a:xfrm>
-            <a:off x="2194560" y="6446520"/>
-            <a:ext cx="5943600" cy="274320"/>
-          </a:xfrm>
-          <a:prstGeom prst="rect">
-            <a:avLst/>
-          </a:prstGeom>
-          <a:noFill/>
-        </p:spPr>
-        <p:txBody>
-          <a:bodyPr wrap="square" anchor="t" lIns="0" rIns="0" tIns="0" bIns="0">
-            <a:spAutoFit/>
-          </a:bodyPr>
-          <a:lstStyle/>
-          <a:p>
-            <a:pPr algn="l"/>
-            <a:r>
-              <a:rPr sz="1000" b="1" i="0">
-                <a:solidFill>
-                  <a:srgbClr val="8F989D"/>
-                </a:solidFill>
-                <a:latin typeface="Calibri"/>
-              </a:rPr>
-              <a:t>Inicio 5:10 pm</a:t>
-            </a:r>
-          </a:p>
-        </p:txBody>
-      </p:sp>
-      <p:sp>
-        <p:nvSpPr>
-          <p:cNvPr id="6" name="TextBox 5"/>
-          <p:cNvSpPr txBox="1"/>
-          <p:nvPr/>
-        </p:nvSpPr>
-        <p:spPr>
-          <a:xfrm>
             <a:off x="11094415" y="6446520"/>
             <a:ext cx="548640" cy="274320"/>
           </a:xfrm>
@@ -7680,41 +7330,6 @@
         </p:nvSpPr>
         <p:spPr>
           <a:xfrm>
-            <a:off x="2194560" y="6446520"/>
-            <a:ext cx="5943600" cy="274320"/>
-          </a:xfrm>
-          <a:prstGeom prst="rect">
-            <a:avLst/>
-          </a:prstGeom>
-          <a:noFill/>
-        </p:spPr>
-        <p:txBody>
-          <a:bodyPr wrap="square" anchor="t" lIns="0" rIns="0" tIns="0" bIns="0">
-            <a:spAutoFit/>
-          </a:bodyPr>
-          <a:lstStyle/>
-          <a:p>
-            <a:pPr algn="l"/>
-            <a:r>
-              <a:rPr sz="1000" b="1" i="0">
-                <a:solidFill>
-                  <a:srgbClr val="8F989D"/>
-                </a:solidFill>
-                <a:latin typeface="Calibri"/>
-              </a:rPr>
-              <a:t>Inicio 5:10 pm</a:t>
-            </a:r>
-          </a:p>
-        </p:txBody>
-      </p:sp>
-      <p:sp>
-        <p:nvSpPr>
-          <p:cNvPr id="6" name="TextBox 5"/>
-          <p:cNvSpPr txBox="1"/>
-          <p:nvPr/>
-        </p:nvSpPr>
-        <p:spPr>
-          <a:xfrm>
             <a:off x="11094415" y="6446520"/>
             <a:ext cx="548640" cy="274320"/>
           </a:xfrm>
@@ -8096,41 +7711,6 @@
         </p:nvSpPr>
         <p:spPr>
           <a:xfrm>
-            <a:off x="2194560" y="6446520"/>
-            <a:ext cx="5943600" cy="274320"/>
-          </a:xfrm>
-          <a:prstGeom prst="rect">
-            <a:avLst/>
-          </a:prstGeom>
-          <a:noFill/>
-        </p:spPr>
-        <p:txBody>
-          <a:bodyPr wrap="square" anchor="t" lIns="0" rIns="0" tIns="0" bIns="0">
-            <a:spAutoFit/>
-          </a:bodyPr>
-          <a:lstStyle/>
-          <a:p>
-            <a:pPr algn="l"/>
-            <a:r>
-              <a:rPr sz="1000" b="1" i="0">
-                <a:solidFill>
-                  <a:srgbClr val="8F989D"/>
-                </a:solidFill>
-                <a:latin typeface="Calibri"/>
-              </a:rPr>
-              <a:t>Inicio 5:10 pm</a:t>
-            </a:r>
-          </a:p>
-        </p:txBody>
-      </p:sp>
-      <p:sp>
-        <p:nvSpPr>
-          <p:cNvPr id="6" name="TextBox 5"/>
-          <p:cNvSpPr txBox="1"/>
-          <p:nvPr/>
-        </p:nvSpPr>
-        <p:spPr>
-          <a:xfrm>
             <a:off x="11094415" y="6446520"/>
             <a:ext cx="548640" cy="274320"/>
           </a:xfrm>
@@ -8160,7 +7740,7 @@
       </p:sp>
       <p:sp>
         <p:nvSpPr>
-          <p:cNvPr id="7" name="TextBox 6"/>
+          <p:cNvPr id="6" name="TextBox 5"/>
           <p:cNvSpPr txBox="1"/>
           <p:nvPr/>
         </p:nvSpPr>
@@ -8780,41 +8360,6 @@
         </p:nvSpPr>
         <p:spPr>
           <a:xfrm>
-            <a:off x="2194560" y="6446520"/>
-            <a:ext cx="5943600" cy="274320"/>
-          </a:xfrm>
-          <a:prstGeom prst="rect">
-            <a:avLst/>
-          </a:prstGeom>
-          <a:noFill/>
-        </p:spPr>
-        <p:txBody>
-          <a:bodyPr wrap="square" anchor="t" lIns="0" rIns="0" tIns="0" bIns="0">
-            <a:spAutoFit/>
-          </a:bodyPr>
-          <a:lstStyle/>
-          <a:p>
-            <a:pPr algn="l"/>
-            <a:r>
-              <a:rPr sz="1000" b="1" i="0">
-                <a:solidFill>
-                  <a:srgbClr val="8F989D"/>
-                </a:solidFill>
-                <a:latin typeface="Calibri"/>
-              </a:rPr>
-              <a:t>Inicio 5:10 pm</a:t>
-            </a:r>
-          </a:p>
-        </p:txBody>
-      </p:sp>
-      <p:sp>
-        <p:nvSpPr>
-          <p:cNvPr id="6" name="TextBox 5"/>
-          <p:cNvSpPr txBox="1"/>
-          <p:nvPr/>
-        </p:nvSpPr>
-        <p:spPr>
-          <a:xfrm>
             <a:off x="11094415" y="6446520"/>
             <a:ext cx="548640" cy="274320"/>
           </a:xfrm>
@@ -8844,7 +8389,7 @@
       </p:sp>
       <p:sp>
         <p:nvSpPr>
-          <p:cNvPr id="7" name="TextBox 6"/>
+          <p:cNvPr id="6" name="TextBox 5"/>
           <p:cNvSpPr txBox="1"/>
           <p:nvPr/>
         </p:nvSpPr>
@@ -9300,41 +8845,6 @@
         </p:nvSpPr>
         <p:spPr>
           <a:xfrm>
-            <a:off x="2194560" y="6446520"/>
-            <a:ext cx="5943600" cy="274320"/>
-          </a:xfrm>
-          <a:prstGeom prst="rect">
-            <a:avLst/>
-          </a:prstGeom>
-          <a:noFill/>
-        </p:spPr>
-        <p:txBody>
-          <a:bodyPr wrap="square" anchor="t" lIns="0" rIns="0" tIns="0" bIns="0">
-            <a:spAutoFit/>
-          </a:bodyPr>
-          <a:lstStyle/>
-          <a:p>
-            <a:pPr algn="l"/>
-            <a:r>
-              <a:rPr sz="1000" b="1" i="0">
-                <a:solidFill>
-                  <a:srgbClr val="8F989D"/>
-                </a:solidFill>
-                <a:latin typeface="Calibri"/>
-              </a:rPr>
-              <a:t>Inicio 5:10 pm</a:t>
-            </a:r>
-          </a:p>
-        </p:txBody>
-      </p:sp>
-      <p:sp>
-        <p:nvSpPr>
-          <p:cNvPr id="6" name="TextBox 5"/>
-          <p:cNvSpPr txBox="1"/>
-          <p:nvPr/>
-        </p:nvSpPr>
-        <p:spPr>
-          <a:xfrm>
             <a:off x="11094415" y="6446520"/>
             <a:ext cx="548640" cy="274320"/>
           </a:xfrm>
@@ -9548,41 +9058,6 @@
         </p:nvSpPr>
         <p:spPr>
           <a:xfrm>
-            <a:off x="2194560" y="6446520"/>
-            <a:ext cx="5943600" cy="274320"/>
-          </a:xfrm>
-          <a:prstGeom prst="rect">
-            <a:avLst/>
-          </a:prstGeom>
-          <a:noFill/>
-        </p:spPr>
-        <p:txBody>
-          <a:bodyPr wrap="square" anchor="t" lIns="0" rIns="0" tIns="0" bIns="0">
-            <a:spAutoFit/>
-          </a:bodyPr>
-          <a:lstStyle/>
-          <a:p>
-            <a:pPr algn="l"/>
-            <a:r>
-              <a:rPr sz="1000" b="1" i="0">
-                <a:solidFill>
-                  <a:srgbClr val="8F989D"/>
-                </a:solidFill>
-                <a:latin typeface="Calibri"/>
-              </a:rPr>
-              <a:t>Inicio 5:10 pm</a:t>
-            </a:r>
-          </a:p>
-        </p:txBody>
-      </p:sp>
-      <p:sp>
-        <p:nvSpPr>
-          <p:cNvPr id="6" name="TextBox 5"/>
-          <p:cNvSpPr txBox="1"/>
-          <p:nvPr/>
-        </p:nvSpPr>
-        <p:spPr>
-          <a:xfrm>
             <a:off x="11094415" y="6446520"/>
             <a:ext cx="548640" cy="274320"/>
           </a:xfrm>
@@ -9989,41 +9464,6 @@
         </p:nvSpPr>
         <p:spPr>
           <a:xfrm>
-            <a:off x="2194560" y="6446520"/>
-            <a:ext cx="5943600" cy="274320"/>
-          </a:xfrm>
-          <a:prstGeom prst="rect">
-            <a:avLst/>
-          </a:prstGeom>
-          <a:noFill/>
-        </p:spPr>
-        <p:txBody>
-          <a:bodyPr wrap="square" anchor="t" lIns="0" rIns="0" tIns="0" bIns="0">
-            <a:spAutoFit/>
-          </a:bodyPr>
-          <a:lstStyle/>
-          <a:p>
-            <a:pPr algn="l"/>
-            <a:r>
-              <a:rPr sz="1000" b="1" i="0">
-                <a:solidFill>
-                  <a:srgbClr val="8F989D"/>
-                </a:solidFill>
-                <a:latin typeface="Calibri"/>
-              </a:rPr>
-              <a:t>Inicio 5:10 pm</a:t>
-            </a:r>
-          </a:p>
-        </p:txBody>
-      </p:sp>
-      <p:sp>
-        <p:nvSpPr>
-          <p:cNvPr id="6" name="TextBox 5"/>
-          <p:cNvSpPr txBox="1"/>
-          <p:nvPr/>
-        </p:nvSpPr>
-        <p:spPr>
-          <a:xfrm>
             <a:off x="11094415" y="6446520"/>
             <a:ext cx="548640" cy="274320"/>
           </a:xfrm>
@@ -10203,41 +9643,6 @@
         </p:nvSpPr>
         <p:spPr>
           <a:xfrm>
-            <a:off x="2194560" y="6446520"/>
-            <a:ext cx="5943600" cy="274320"/>
-          </a:xfrm>
-          <a:prstGeom prst="rect">
-            <a:avLst/>
-          </a:prstGeom>
-          <a:noFill/>
-        </p:spPr>
-        <p:txBody>
-          <a:bodyPr wrap="square" anchor="t" lIns="0" rIns="0" tIns="0" bIns="0">
-            <a:spAutoFit/>
-          </a:bodyPr>
-          <a:lstStyle/>
-          <a:p>
-            <a:pPr algn="l"/>
-            <a:r>
-              <a:rPr sz="1000" b="1" i="0">
-                <a:solidFill>
-                  <a:srgbClr val="8F989D"/>
-                </a:solidFill>
-                <a:latin typeface="Calibri"/>
-              </a:rPr>
-              <a:t>Inicio 5:10 pm</a:t>
-            </a:r>
-          </a:p>
-        </p:txBody>
-      </p:sp>
-      <p:sp>
-        <p:nvSpPr>
-          <p:cNvPr id="6" name="TextBox 5"/>
-          <p:cNvSpPr txBox="1"/>
-          <p:nvPr/>
-        </p:nvSpPr>
-        <p:spPr>
-          <a:xfrm>
             <a:off x="11094415" y="6446520"/>
             <a:ext cx="548640" cy="274320"/>
           </a:xfrm>
@@ -10480,41 +9885,6 @@
                 <a:latin typeface="Calibri"/>
               </a:rPr>
               <a:t>INVESTIGACIÓN, CIENCIA Y TECNOLOGÍA</a:t>
-            </a:r>
-          </a:p>
-        </p:txBody>
-      </p:sp>
-      <p:sp>
-        <p:nvSpPr>
-          <p:cNvPr id="7" name="TextBox 6"/>
-          <p:cNvSpPr txBox="1"/>
-          <p:nvPr/>
-        </p:nvSpPr>
-        <p:spPr>
-          <a:xfrm>
-            <a:off x="2194560" y="6446520"/>
-            <a:ext cx="5943600" cy="274320"/>
-          </a:xfrm>
-          <a:prstGeom prst="rect">
-            <a:avLst/>
-          </a:prstGeom>
-          <a:noFill/>
-        </p:spPr>
-        <p:txBody>
-          <a:bodyPr wrap="square" anchor="t" lIns="0" rIns="0" tIns="0" bIns="0">
-            <a:spAutoFit/>
-          </a:bodyPr>
-          <a:lstStyle/>
-          <a:p>
-            <a:pPr algn="l"/>
-            <a:r>
-              <a:rPr sz="1000" b="1" i="0">
-                <a:solidFill>
-                  <a:srgbClr val="8F989D"/>
-                </a:solidFill>
-                <a:latin typeface="Calibri"/>
-              </a:rPr>
-              <a:t>Inicio 5:10 pm</a:t>
             </a:r>
           </a:p>
         </p:txBody>
@@ -11357,41 +10727,6 @@
         </p:nvSpPr>
         <p:spPr>
           <a:xfrm>
-            <a:off x="2194560" y="6446520"/>
-            <a:ext cx="5943600" cy="274320"/>
-          </a:xfrm>
-          <a:prstGeom prst="rect">
-            <a:avLst/>
-          </a:prstGeom>
-          <a:noFill/>
-        </p:spPr>
-        <p:txBody>
-          <a:bodyPr wrap="square" anchor="t" lIns="0" rIns="0" tIns="0" bIns="0">
-            <a:spAutoFit/>
-          </a:bodyPr>
-          <a:lstStyle/>
-          <a:p>
-            <a:pPr algn="l"/>
-            <a:r>
-              <a:rPr sz="1000" b="1" i="0">
-                <a:solidFill>
-                  <a:srgbClr val="8F989D"/>
-                </a:solidFill>
-                <a:latin typeface="Calibri"/>
-              </a:rPr>
-              <a:t>Inicio 5:10 pm</a:t>
-            </a:r>
-          </a:p>
-        </p:txBody>
-      </p:sp>
-      <p:sp>
-        <p:nvSpPr>
-          <p:cNvPr id="7" name="TextBox 6"/>
-          <p:cNvSpPr txBox="1"/>
-          <p:nvPr/>
-        </p:nvSpPr>
-        <p:spPr>
-          <a:xfrm>
             <a:off x="11094415" y="6446520"/>
             <a:ext cx="548640" cy="274320"/>
           </a:xfrm>
@@ -11825,41 +11160,6 @@
         </p:nvSpPr>
         <p:spPr>
           <a:xfrm>
-            <a:off x="2194560" y="6446520"/>
-            <a:ext cx="5943600" cy="274320"/>
-          </a:xfrm>
-          <a:prstGeom prst="rect">
-            <a:avLst/>
-          </a:prstGeom>
-          <a:noFill/>
-        </p:spPr>
-        <p:txBody>
-          <a:bodyPr wrap="square" anchor="t" lIns="0" rIns="0" tIns="0" bIns="0">
-            <a:spAutoFit/>
-          </a:bodyPr>
-          <a:lstStyle/>
-          <a:p>
-            <a:pPr algn="l"/>
-            <a:r>
-              <a:rPr sz="1000" b="1" i="0">
-                <a:solidFill>
-                  <a:srgbClr val="8F989D"/>
-                </a:solidFill>
-                <a:latin typeface="Calibri"/>
-              </a:rPr>
-              <a:t>Inicio 5:10 pm</a:t>
-            </a:r>
-          </a:p>
-        </p:txBody>
-      </p:sp>
-      <p:sp>
-        <p:nvSpPr>
-          <p:cNvPr id="6" name="TextBox 5"/>
-          <p:cNvSpPr txBox="1"/>
-          <p:nvPr/>
-        </p:nvSpPr>
-        <p:spPr>
-          <a:xfrm>
             <a:off x="11094415" y="6446520"/>
             <a:ext cx="548640" cy="274320"/>
           </a:xfrm>
@@ -12052,41 +11352,6 @@
       <p:sp>
         <p:nvSpPr>
           <p:cNvPr id="5" name="TextBox 4"/>
-          <p:cNvSpPr txBox="1"/>
-          <p:nvPr/>
-        </p:nvSpPr>
-        <p:spPr>
-          <a:xfrm>
-            <a:off x="2194560" y="6446520"/>
-            <a:ext cx="5943600" cy="274320"/>
-          </a:xfrm>
-          <a:prstGeom prst="rect">
-            <a:avLst/>
-          </a:prstGeom>
-          <a:noFill/>
-        </p:spPr>
-        <p:txBody>
-          <a:bodyPr wrap="square" anchor="t" lIns="0" rIns="0" tIns="0" bIns="0">
-            <a:spAutoFit/>
-          </a:bodyPr>
-          <a:lstStyle/>
-          <a:p>
-            <a:pPr algn="l"/>
-            <a:r>
-              <a:rPr sz="1000" b="1" i="0">
-                <a:solidFill>
-                  <a:srgbClr val="8F989D"/>
-                </a:solidFill>
-                <a:latin typeface="Calibri"/>
-              </a:rPr>
-              <a:t>Inicio 5:10 pm</a:t>
-            </a:r>
-          </a:p>
-        </p:txBody>
-      </p:sp>
-      <p:sp>
-        <p:nvSpPr>
-          <p:cNvPr id="6" name="TextBox 5"/>
           <p:cNvSpPr txBox="1"/>
           <p:nvPr/>
         </p:nvSpPr>
@@ -12862,41 +12127,6 @@
         </p:nvSpPr>
         <p:spPr>
           <a:xfrm>
-            <a:off x="2194560" y="6446520"/>
-            <a:ext cx="5943600" cy="274320"/>
-          </a:xfrm>
-          <a:prstGeom prst="rect">
-            <a:avLst/>
-          </a:prstGeom>
-          <a:noFill/>
-        </p:spPr>
-        <p:txBody>
-          <a:bodyPr wrap="square" anchor="t" lIns="0" rIns="0" tIns="0" bIns="0">
-            <a:spAutoFit/>
-          </a:bodyPr>
-          <a:lstStyle/>
-          <a:p>
-            <a:pPr algn="l"/>
-            <a:r>
-              <a:rPr sz="1000" b="1" i="0">
-                <a:solidFill>
-                  <a:srgbClr val="8F989D"/>
-                </a:solidFill>
-                <a:latin typeface="Calibri"/>
-              </a:rPr>
-              <a:t>Inicio 5:10 pm</a:t>
-            </a:r>
-          </a:p>
-        </p:txBody>
-      </p:sp>
-      <p:sp>
-        <p:nvSpPr>
-          <p:cNvPr id="7" name="TextBox 6"/>
-          <p:cNvSpPr txBox="1"/>
-          <p:nvPr/>
-        </p:nvSpPr>
-        <p:spPr>
-          <a:xfrm>
             <a:off x="11094415" y="6446520"/>
             <a:ext cx="548640" cy="274320"/>
           </a:xfrm>
@@ -13332,41 +12562,6 @@
         </p:nvSpPr>
         <p:spPr>
           <a:xfrm>
-            <a:off x="2194560" y="6446520"/>
-            <a:ext cx="5943600" cy="274320"/>
-          </a:xfrm>
-          <a:prstGeom prst="rect">
-            <a:avLst/>
-          </a:prstGeom>
-          <a:noFill/>
-        </p:spPr>
-        <p:txBody>
-          <a:bodyPr wrap="square" anchor="t" lIns="0" rIns="0" tIns="0" bIns="0">
-            <a:spAutoFit/>
-          </a:bodyPr>
-          <a:lstStyle/>
-          <a:p>
-            <a:pPr algn="l"/>
-            <a:r>
-              <a:rPr sz="1000" b="1" i="0">
-                <a:solidFill>
-                  <a:srgbClr val="8F989D"/>
-                </a:solidFill>
-                <a:latin typeface="Calibri"/>
-              </a:rPr>
-              <a:t>Inicio 5:10 pm</a:t>
-            </a:r>
-          </a:p>
-        </p:txBody>
-      </p:sp>
-      <p:sp>
-        <p:nvSpPr>
-          <p:cNvPr id="6" name="TextBox 5"/>
-          <p:cNvSpPr txBox="1"/>
-          <p:nvPr/>
-        </p:nvSpPr>
-        <p:spPr>
-          <a:xfrm>
             <a:off x="11094415" y="6446520"/>
             <a:ext cx="548640" cy="274320"/>
           </a:xfrm>
@@ -13580,41 +12775,6 @@
         </p:nvSpPr>
         <p:spPr>
           <a:xfrm>
-            <a:off x="2194560" y="6446520"/>
-            <a:ext cx="5943600" cy="274320"/>
-          </a:xfrm>
-          <a:prstGeom prst="rect">
-            <a:avLst/>
-          </a:prstGeom>
-          <a:noFill/>
-        </p:spPr>
-        <p:txBody>
-          <a:bodyPr wrap="square" anchor="t" lIns="0" rIns="0" tIns="0" bIns="0">
-            <a:spAutoFit/>
-          </a:bodyPr>
-          <a:lstStyle/>
-          <a:p>
-            <a:pPr algn="l"/>
-            <a:r>
-              <a:rPr sz="1000" b="1" i="0">
-                <a:solidFill>
-                  <a:srgbClr val="8F989D"/>
-                </a:solidFill>
-                <a:latin typeface="Calibri"/>
-              </a:rPr>
-              <a:t>Inicio 5:10 pm</a:t>
-            </a:r>
-          </a:p>
-        </p:txBody>
-      </p:sp>
-      <p:sp>
-        <p:nvSpPr>
-          <p:cNvPr id="6" name="TextBox 5"/>
-          <p:cNvSpPr txBox="1"/>
-          <p:nvPr/>
-        </p:nvSpPr>
-        <p:spPr>
-          <a:xfrm>
             <a:off x="11094415" y="6446520"/>
             <a:ext cx="548640" cy="274320"/>
           </a:xfrm>
@@ -14097,41 +13257,6 @@
       <p:sp>
         <p:nvSpPr>
           <p:cNvPr id="5" name="TextBox 4"/>
-          <p:cNvSpPr txBox="1"/>
-          <p:nvPr/>
-        </p:nvSpPr>
-        <p:spPr>
-          <a:xfrm>
-            <a:off x="2194560" y="6446520"/>
-            <a:ext cx="5943600" cy="274320"/>
-          </a:xfrm>
-          <a:prstGeom prst="rect">
-            <a:avLst/>
-          </a:prstGeom>
-          <a:noFill/>
-        </p:spPr>
-        <p:txBody>
-          <a:bodyPr wrap="square" anchor="t" lIns="0" rIns="0" tIns="0" bIns="0">
-            <a:spAutoFit/>
-          </a:bodyPr>
-          <a:lstStyle/>
-          <a:p>
-            <a:pPr algn="l"/>
-            <a:r>
-              <a:rPr sz="1000" b="1" i="0">
-                <a:solidFill>
-                  <a:srgbClr val="8F989D"/>
-                </a:solidFill>
-                <a:latin typeface="Calibri"/>
-              </a:rPr>
-              <a:t>Inicio 5:10 pm</a:t>
-            </a:r>
-          </a:p>
-        </p:txBody>
-      </p:sp>
-      <p:sp>
-        <p:nvSpPr>
-          <p:cNvPr id="6" name="TextBox 5"/>
           <p:cNvSpPr txBox="1"/>
           <p:nvPr/>
         </p:nvSpPr>
